--- a/assets/pptx/catalog-99.pptx
+++ b/assets/pptx/catalog-99.pptx
@@ -3623,7 +3623,7 @@
                 <a:ea typeface="Ebrima"/>
                 <a:cs typeface="Ebrima"/>
               </a:rPr>
-              <a:t>(2x) ክበር ክበርልኝ ጌታዬ ክበር ክበርልኝ ንገሥ ንገሥልኝ ጌታዬ ንገሥ ንገሥልኝ</a:t>
+              <a:t>2x ክበር ክበርልኝ ጌታዬ ክበር ክበርልኝ ንገሥ ንገሥልኝ ጌታዬ ንገሥ ንገሥልኝ</a:t>
             </a:r>
           </a:p>
         </p:txBody>
@@ -4159,7 +4159,7 @@
                 <a:ea typeface="Ebrima"/>
                 <a:cs typeface="Ebrima"/>
               </a:rPr>
-              <a:t>(2x) ክበር ክበርልኝ ጌታዬ ክበር ክበርልኝ ንገሥ ንገሥልኝ ጌታዬ ንገሥ ንገሥልኝ</a:t>
+              <a:t>2x ክበር ክበርልኝ ጌታዬ ክበር ክበርልኝ ንገሥ ንገሥልኝ ጌታዬ ንገሥ ንገሥልኝ</a:t>
             </a:r>
           </a:p>
         </p:txBody>
@@ -4628,7 +4628,7 @@
                 <a:ea typeface="Ebrima"/>
                 <a:cs typeface="Ebrima"/>
               </a:rPr>
-              <a:t>(2x) ክበር ክበርልኝ ጌታዬ ክበር ክበርልኝ ንገሥ ንገሥልኝ ጌታዬ ንገሥ ንገሥልኝ</a:t>
+              <a:t>2x ክበር ክበርልኝ ጌታዬ ክበር ክበርልኝ ንገሥ ንገሥልኝ ጌታዬ ንገሥ ንገሥልኝ</a:t>
             </a:r>
           </a:p>
         </p:txBody>
@@ -5030,7 +5030,7 @@
                 <a:ea typeface="Ebrima"/>
                 <a:cs typeface="Ebrima"/>
               </a:rPr>
-              <a:t>ተመስገን እለዋለሁ ከእግሩ ስር አሰግዳለሁ (2x)</a:t>
+              <a:t>ተመስገን እለዋለሁ ከእግሩ ስር አሰግዳለሁ 2x</a:t>
             </a:r>
           </a:p>
         </p:txBody>
@@ -5164,7 +5164,7 @@
                 <a:ea typeface="Ebrima"/>
                 <a:cs typeface="Ebrima"/>
               </a:rPr>
-              <a:t>ዛሬም አይነስብህ ይድረስልህ (ሃሌሉያ)</a:t>
+              <a:t>ዛሬም አይነስብህ ይድረስልህ ሃሌሉያ</a:t>
             </a:r>
           </a:p>
         </p:txBody>
@@ -5767,7 +5767,7 @@
                 <a:ea typeface="Ebrima"/>
                 <a:cs typeface="Ebrima"/>
               </a:rPr>
-              <a:t>ተመስገን እልሃለሁ ከእግሩ ስር አሰግዳለሁ (2x)</a:t>
+              <a:t>ተመስገን እልሃለሁ ከእግሩ ስር አሰግዳለሁ 2x</a:t>
             </a:r>
           </a:p>
         </p:txBody>
@@ -5901,7 +5901,7 @@
                 <a:ea typeface="Ebrima"/>
                 <a:cs typeface="Ebrima"/>
               </a:rPr>
-              <a:t>ዛሬም አይነስብህ ይድረስልህ (ሃሌሉያ)</a:t>
+              <a:t>ዛሬም አይነስብህ ይድረስልህ ሃሌሉያ</a:t>
             </a:r>
           </a:p>
         </p:txBody>
@@ -6370,7 +6370,7 @@
                 <a:ea typeface="Ebrima"/>
                 <a:cs typeface="Ebrima"/>
               </a:rPr>
-              <a:t>(2x) ክበር ክበርልኝ ጌታዬ ክበር ክበርልኝ ንገሥ ንገሥልኝ ጌታዬ ንገሥ ንገሥልኝ</a:t>
+              <a:t>2x ክበር ክበርልኝ ጌታዬ ክበር ክበርልኝ ንገሥ ንገሥልኝ ጌታዬ ንገሥ ንገሥልኝ</a:t>
             </a:r>
           </a:p>
         </p:txBody>
